--- a/08_Arrays/08_ArraysParameter.pptx
+++ b/08_Arrays/08_ArraysParameter.pptx
@@ -210,7 +210,7 @@
           <a:p>
             <a:fld id="{BF336932-01FD-45AF-B110-84880AA37D65}" type="datetimeFigureOut">
               <a:rPr lang="de-AT" smtClean="0"/>
-              <a:t>27.02.2022</a:t>
+              <a:t>28.02.2022</a:t>
             </a:fld>
             <a:endParaRPr lang="de-AT"/>
           </a:p>
@@ -2828,7 +2828,7 @@
         <p:spPr>
           <a:xfrm>
             <a:off x="782657" y="2200225"/>
-            <a:ext cx="7416824" cy="2031325"/>
+            <a:ext cx="7416824" cy="2308324"/>
           </a:xfrm>
           <a:prstGeom prst="rect">
             <a:avLst/>
@@ -2942,6 +2942,41 @@
               </a:rPr>
               <a:t>{</a:t>
             </a:r>
+          </a:p>
+          <a:p>
+            <a:r>
+              <a:rPr lang="de-AT" dirty="0">
+                <a:solidFill>
+                  <a:srgbClr val="000000"/>
+                </a:solidFill>
+                <a:latin typeface="Cascadia Mono" panose="020B0609020000020004" pitchFamily="49" charset="0"/>
+              </a:rPr>
+              <a:t>  </a:t>
+            </a:r>
+            <a:r>
+              <a:rPr lang="de-AT" dirty="0" err="1">
+                <a:solidFill>
+                  <a:srgbClr val="000000"/>
+                </a:solidFill>
+                <a:latin typeface="Cascadia Mono" panose="020B0609020000020004" pitchFamily="49" charset="0"/>
+              </a:rPr>
+              <a:t>addValue</a:t>
+            </a:r>
+            <a:r>
+              <a:rPr lang="de-AT">
+                <a:solidFill>
+                  <a:srgbClr val="000000"/>
+                </a:solidFill>
+                <a:latin typeface="Cascadia Mono" panose="020B0609020000020004" pitchFamily="49" charset="0"/>
+              </a:rPr>
+              <a:t> += 2;</a:t>
+            </a:r>
+            <a:endParaRPr lang="de-AT" sz="1800" dirty="0">
+              <a:solidFill>
+                <a:srgbClr val="000000"/>
+              </a:solidFill>
+              <a:latin typeface="Cascadia Mono" panose="020B0609020000020004" pitchFamily="49" charset="0"/>
+            </a:endParaRPr>
           </a:p>
           <a:p>
             <a:r>
